--- a/assets/slides/lecture-02-slides.pptx
+++ b/assets/slides/lecture-02-slides.pptx
@@ -402,9 +402,7 @@
           <a:bodyPr/>
           <a:lstStyle/>
           <a:p>
-            <a:r>
-              <a:t>Have students trace the path aloud. Use conventional current direction only; avoid electron-flow digression.</a:t>
-            </a:r>
+            <a:endParaRPr dirty="0"/>
           </a:p>
         </p:txBody>
       </p:sp>
@@ -501,9 +499,7 @@
           <a:bodyPr/>
           <a:lstStyle/>
           <a:p>
-            <a:r>
-              <a:t>Have students trace the path aloud. Use conventional current direction only; avoid electron-flow digression.</a:t>
-            </a:r>
+            <a:endParaRPr dirty="0"/>
           </a:p>
         </p:txBody>
       </p:sp>
@@ -600,9 +596,7 @@
           <a:bodyPr/>
           <a:lstStyle/>
           <a:p>
-            <a:r>
-              <a:t>Have students trace the path aloud. Use conventional current direction only; avoid electron-flow digression.</a:t>
-            </a:r>
+            <a:endParaRPr dirty="0"/>
           </a:p>
         </p:txBody>
       </p:sp>
@@ -699,9 +693,7 @@
           <a:bodyPr/>
           <a:lstStyle/>
           <a:p>
-            <a:r>
-              <a:t>Have students trace the path aloud. Use conventional current direction only; avoid electron-flow digression.</a:t>
-            </a:r>
+            <a:endParaRPr dirty="0"/>
           </a:p>
         </p:txBody>
       </p:sp>
@@ -798,9 +790,7 @@
           <a:bodyPr/>
           <a:lstStyle/>
           <a:p>
-            <a:r>
-              <a:t>Have students trace the path aloud. Use conventional current direction only; avoid electron-flow digression.</a:t>
-            </a:r>
+            <a:endParaRPr dirty="0"/>
           </a:p>
         </p:txBody>
       </p:sp>
@@ -879,9 +869,7 @@
           <a:bodyPr/>
           <a:lstStyle/>
           <a:p>
-            <a:r>
-              <a:t>Perform a physical demonstration with the department meter if available. This is the most important safety segment before lab.</a:t>
-            </a:r>
+            <a:endParaRPr dirty="0"/>
           </a:p>
         </p:txBody>
       </p:sp>
@@ -967,9 +955,7 @@
           <a:bodyPr/>
           <a:lstStyle/>
           <a:p>
-            <a:r>
-              <a:t>Perform a physical demonstration with the department meter if available. This is the most important safety segment before lab.</a:t>
-            </a:r>
+            <a:endParaRPr dirty="0"/>
           </a:p>
         </p:txBody>
       </p:sp>
@@ -1066,9 +1052,7 @@
           <a:bodyPr/>
           <a:lstStyle/>
           <a:p>
-            <a:r>
-              <a:t>Perform a physical demonstration with the department meter if available. This is the most important safety segment before lab.</a:t>
-            </a:r>
+            <a:endParaRPr dirty="0"/>
           </a:p>
         </p:txBody>
       </p:sp>
@@ -1147,9 +1131,7 @@
           <a:bodyPr/>
           <a:lstStyle/>
           <a:p>
-            <a:r>
-              <a:t>Ask whether a 1% difference proves tamper. Expected answer: not without tolerance, instrument accuracy, and repeatability context.</a:t>
-            </a:r>
+            <a:endParaRPr dirty="0"/>
           </a:p>
         </p:txBody>
       </p:sp>
@@ -1235,9 +1217,7 @@
           <a:bodyPr/>
           <a:lstStyle/>
           <a:p>
-            <a:r>
-              <a:t>Have students trace the path aloud. Use conventional current direction only; avoid electron-flow digression.</a:t>
-            </a:r>
+            <a:endParaRPr dirty="0"/>
           </a:p>
         </p:txBody>
       </p:sp>
@@ -1413,14 +1393,6 @@
           <a:bodyPr/>
           <a:lstStyle/>
           <a:p>
-            <a:r>
-              <a:rPr dirty="0"/>
-              <a:t>Expected current is 1.00 mA</a:t>
-            </a:r>
-            <a:r>
-              <a:rPr lang="en-US" dirty="0"/>
-              <a:t>. Meter must be inserted in series</a:t>
-            </a:r>
             <a:endParaRPr dirty="0"/>
           </a:p>
         </p:txBody>
@@ -1507,9 +1479,7 @@
           <a:bodyPr/>
           <a:lstStyle/>
           <a:p>
-            <a:r>
-              <a:t>Expected current is 1.00 mA. Meter must be inserted in series after power is disabled for rewiring.</a:t>
-            </a:r>
+            <a:endParaRPr dirty="0"/>
           </a:p>
         </p:txBody>
       </p:sp>
@@ -1588,9 +1558,7 @@
           <a:bodyPr/>
           <a:lstStyle/>
           <a:p>
-            <a:r>
-              <a:t>Treat this as retrieval, not first exposure. Ask: voltage at node A relative to what? Reinforce that current belongs to a path.</a:t>
-            </a:r>
+            <a:endParaRPr dirty="0"/>
           </a:p>
         </p:txBody>
       </p:sp>
@@ -1726,9 +1694,7 @@
           <a:bodyPr/>
           <a:lstStyle/>
           <a:p>
-            <a:r>
-              <a:t>Work one mental example: 5 V across 5 kohm gives 1 mA and 5 mW total.</a:t>
-            </a:r>
+            <a:endParaRPr dirty="0"/>
           </a:p>
         </p:txBody>
       </p:sp>
@@ -1814,26 +1780,7 @@
           <a:bodyPr/>
           <a:lstStyle/>
           <a:p>
-            <a:r>
-              <a:rPr dirty="0"/>
-              <a:t>Work one mental example: 5 V across 5 </a:t>
-            </a:r>
-            <a:r>
-              <a:rPr dirty="0" err="1"/>
-              <a:t>kohm</a:t>
-            </a:r>
-            <a:r>
-              <a:rPr dirty="0"/>
-              <a:t> gives 1 mA and 5 </a:t>
-            </a:r>
-            <a:r>
-              <a:rPr dirty="0" err="1"/>
-              <a:t>mW</a:t>
-            </a:r>
-            <a:r>
-              <a:rPr dirty="0"/>
-              <a:t> total.</a:t>
-            </a:r>
+            <a:endParaRPr dirty="0"/>
           </a:p>
         </p:txBody>
       </p:sp>
@@ -1930,10 +1877,6 @@
           <a:bodyPr/>
           <a:lstStyle/>
           <a:p>
-            <a:r>
-              <a:rPr lang="en-US" dirty="0"/>
-              <a:t>Review</a:t>
-            </a:r>
             <a:endParaRPr dirty="0"/>
           </a:p>
         </p:txBody>
@@ -2218,7 +2161,7 @@
           <a:p>
             <a:fld id="{5BCAD085-E8A6-8845-BD4E-CB4CCA059FC4}" type="datetimeFigureOut">
               <a:rPr lang="en-US" smtClean="0"/>
-              <a:t>9/3/2026</a:t>
+              <a:t>9/4/2026</a:t>
             </a:fld>
             <a:endParaRPr lang="en-US"/>
           </a:p>
@@ -2386,7 +2329,7 @@
           <a:p>
             <a:fld id="{5BCAD085-E8A6-8845-BD4E-CB4CCA059FC4}" type="datetimeFigureOut">
               <a:rPr lang="en-US" smtClean="0"/>
-              <a:t>9/3/2026</a:t>
+              <a:t>9/4/2026</a:t>
             </a:fld>
             <a:endParaRPr lang="en-US"/>
           </a:p>
@@ -2564,7 +2507,7 @@
           <a:p>
             <a:fld id="{5BCAD085-E8A6-8845-BD4E-CB4CCA059FC4}" type="datetimeFigureOut">
               <a:rPr lang="en-US" smtClean="0"/>
-              <a:t>9/3/2026</a:t>
+              <a:t>9/4/2026</a:t>
             </a:fld>
             <a:endParaRPr lang="en-US"/>
           </a:p>
@@ -2732,7 +2675,7 @@
           <a:p>
             <a:fld id="{5BCAD085-E8A6-8845-BD4E-CB4CCA059FC4}" type="datetimeFigureOut">
               <a:rPr lang="en-US" smtClean="0"/>
-              <a:t>9/3/2026</a:t>
+              <a:t>9/4/2026</a:t>
             </a:fld>
             <a:endParaRPr lang="en-US"/>
           </a:p>
@@ -2977,7 +2920,7 @@
           <a:p>
             <a:fld id="{5BCAD085-E8A6-8845-BD4E-CB4CCA059FC4}" type="datetimeFigureOut">
               <a:rPr lang="en-US" smtClean="0"/>
-              <a:t>9/3/2026</a:t>
+              <a:t>9/4/2026</a:t>
             </a:fld>
             <a:endParaRPr lang="en-US"/>
           </a:p>
@@ -3262,7 +3205,7 @@
           <a:p>
             <a:fld id="{5BCAD085-E8A6-8845-BD4E-CB4CCA059FC4}" type="datetimeFigureOut">
               <a:rPr lang="en-US" smtClean="0"/>
-              <a:t>9/3/2026</a:t>
+              <a:t>9/4/2026</a:t>
             </a:fld>
             <a:endParaRPr lang="en-US"/>
           </a:p>
@@ -3681,7 +3624,7 @@
           <a:p>
             <a:fld id="{5BCAD085-E8A6-8845-BD4E-CB4CCA059FC4}" type="datetimeFigureOut">
               <a:rPr lang="en-US" smtClean="0"/>
-              <a:t>9/3/2026</a:t>
+              <a:t>9/4/2026</a:t>
             </a:fld>
             <a:endParaRPr lang="en-US"/>
           </a:p>
@@ -3798,7 +3741,7 @@
           <a:p>
             <a:fld id="{5BCAD085-E8A6-8845-BD4E-CB4CCA059FC4}" type="datetimeFigureOut">
               <a:rPr lang="en-US" smtClean="0"/>
-              <a:t>9/3/2026</a:t>
+              <a:t>9/4/2026</a:t>
             </a:fld>
             <a:endParaRPr lang="en-US"/>
           </a:p>
@@ -3893,7 +3836,7 @@
           <a:p>
             <a:fld id="{5BCAD085-E8A6-8845-BD4E-CB4CCA059FC4}" type="datetimeFigureOut">
               <a:rPr lang="en-US" smtClean="0"/>
-              <a:t>9/3/2026</a:t>
+              <a:t>9/4/2026</a:t>
             </a:fld>
             <a:endParaRPr lang="en-US"/>
           </a:p>
@@ -4168,7 +4111,7 @@
           <a:p>
             <a:fld id="{5BCAD085-E8A6-8845-BD4E-CB4CCA059FC4}" type="datetimeFigureOut">
               <a:rPr lang="en-US" smtClean="0"/>
-              <a:t>9/3/2026</a:t>
+              <a:t>9/4/2026</a:t>
             </a:fld>
             <a:endParaRPr lang="en-US"/>
           </a:p>
@@ -4420,7 +4363,7 @@
           <a:p>
             <a:fld id="{5BCAD085-E8A6-8845-BD4E-CB4CCA059FC4}" type="datetimeFigureOut">
               <a:rPr lang="en-US" smtClean="0"/>
-              <a:t>9/3/2026</a:t>
+              <a:t>9/4/2026</a:t>
             </a:fld>
             <a:endParaRPr lang="en-US"/>
           </a:p>
@@ -4631,7 +4574,7 @@
           <a:p>
             <a:fld id="{5BCAD085-E8A6-8845-BD4E-CB4CCA059FC4}" type="datetimeFigureOut">
               <a:rPr lang="en-US" smtClean="0"/>
-              <a:t>9/3/2026</a:t>
+              <a:t>9/4/2026</a:t>
             </a:fld>
             <a:endParaRPr lang="en-US"/>
           </a:p>
@@ -6465,8 +6408,8 @@
           </a:p>
         </p:txBody>
       </p:sp>
-      <mc:AlternateContent xmlns:mc="http://schemas.openxmlformats.org/markup-compatibility/2006">
-        <mc:Choice xmlns:a14="http://schemas.microsoft.com/office/drawing/2010/main" Requires="a14">
+      <mc:AlternateContent xmlns:mc="http://schemas.openxmlformats.org/markup-compatibility/2006" xmlns:a14="http://schemas.microsoft.com/office/drawing/2010/main">
+        <mc:Choice Requires="a14">
           <p:sp>
             <p:nvSpPr>
               <p:cNvPr id="46" name="TextBox 45">
@@ -6537,7 +6480,7 @@
             </p:txBody>
           </p:sp>
         </mc:Choice>
-        <mc:Fallback>
+        <mc:Fallback xmlns="">
           <p:sp>
             <p:nvSpPr>
               <p:cNvPr id="46" name="TextBox 45">
@@ -6582,8 +6525,8 @@
           </p:sp>
         </mc:Fallback>
       </mc:AlternateContent>
-      <mc:AlternateContent xmlns:mc="http://schemas.openxmlformats.org/markup-compatibility/2006">
-        <mc:Choice xmlns:a14="http://schemas.microsoft.com/office/drawing/2010/main" Requires="a14">
+      <mc:AlternateContent xmlns:mc="http://schemas.openxmlformats.org/markup-compatibility/2006" xmlns:a14="http://schemas.microsoft.com/office/drawing/2010/main">
+        <mc:Choice Requires="a14">
           <p:sp>
             <p:nvSpPr>
               <p:cNvPr id="48" name="TextBox 47">
@@ -6654,7 +6597,7 @@
             </p:txBody>
           </p:sp>
         </mc:Choice>
-        <mc:Fallback>
+        <mc:Fallback xmlns="">
           <p:sp>
             <p:nvSpPr>
               <p:cNvPr id="48" name="TextBox 47">
@@ -6802,8 +6745,8 @@
           </a:p>
         </p:txBody>
       </p:sp>
-      <mc:AlternateContent xmlns:mc="http://schemas.openxmlformats.org/markup-compatibility/2006">
-        <mc:Choice xmlns:a14="http://schemas.microsoft.com/office/drawing/2010/main" Requires="a14">
+      <mc:AlternateContent xmlns:mc="http://schemas.openxmlformats.org/markup-compatibility/2006" xmlns:a14="http://schemas.microsoft.com/office/drawing/2010/main">
+        <mc:Choice Requires="a14">
           <p:sp>
             <p:nvSpPr>
               <p:cNvPr id="53" name="TextBox 52">
@@ -6862,7 +6805,7 @@
             </p:txBody>
           </p:sp>
         </mc:Choice>
-        <mc:Fallback>
+        <mc:Fallback xmlns="">
           <p:sp>
             <p:nvSpPr>
               <p:cNvPr id="53" name="TextBox 52">
@@ -6907,8 +6850,8 @@
           </p:sp>
         </mc:Fallback>
       </mc:AlternateContent>
-      <mc:AlternateContent xmlns:mc="http://schemas.openxmlformats.org/markup-compatibility/2006">
-        <mc:Choice xmlns:a14="http://schemas.microsoft.com/office/drawing/2010/main" Requires="a14">
+      <mc:AlternateContent xmlns:mc="http://schemas.openxmlformats.org/markup-compatibility/2006" xmlns:a14="http://schemas.microsoft.com/office/drawing/2010/main">
+        <mc:Choice Requires="a14">
           <p:sp>
             <p:nvSpPr>
               <p:cNvPr id="54" name="TextBox 53">
@@ -6971,7 +6914,7 @@
             </p:txBody>
           </p:sp>
         </mc:Choice>
-        <mc:Fallback>
+        <mc:Fallback xmlns="">
           <p:sp>
             <p:nvSpPr>
               <p:cNvPr id="54" name="TextBox 53">
@@ -7164,8 +7107,8 @@
           </a:p>
         </p:txBody>
       </p:sp>
-      <mc:AlternateContent xmlns:mc="http://schemas.openxmlformats.org/markup-compatibility/2006">
-        <mc:Choice xmlns:a14="http://schemas.microsoft.com/office/drawing/2010/main" Requires="a14">
+      <mc:AlternateContent xmlns:mc="http://schemas.openxmlformats.org/markup-compatibility/2006" xmlns:a14="http://schemas.microsoft.com/office/drawing/2010/main">
+        <mc:Choice Requires="a14">
           <p:sp>
             <p:nvSpPr>
               <p:cNvPr id="17" name="TextBox 16">
@@ -7228,7 +7171,7 @@
             </p:txBody>
           </p:sp>
         </mc:Choice>
-        <mc:Fallback>
+        <mc:Fallback xmlns="">
           <p:sp>
             <p:nvSpPr>
               <p:cNvPr id="17" name="TextBox 16">
@@ -8209,8 +8152,8 @@
           </a:p>
         </p:txBody>
       </p:sp>
-      <mc:AlternateContent xmlns:mc="http://schemas.openxmlformats.org/markup-compatibility/2006">
-        <mc:Choice xmlns:a14="http://schemas.microsoft.com/office/drawing/2010/main" Requires="a14">
+      <mc:AlternateContent xmlns:mc="http://schemas.openxmlformats.org/markup-compatibility/2006" xmlns:a14="http://schemas.microsoft.com/office/drawing/2010/main">
+        <mc:Choice Requires="a14">
           <p:sp>
             <p:nvSpPr>
               <p:cNvPr id="46" name="TextBox 45">
@@ -8281,7 +8224,7 @@
             </p:txBody>
           </p:sp>
         </mc:Choice>
-        <mc:Fallback>
+        <mc:Fallback xmlns="">
           <p:sp>
             <p:nvSpPr>
               <p:cNvPr id="46" name="TextBox 45">
@@ -8326,8 +8269,8 @@
           </p:sp>
         </mc:Fallback>
       </mc:AlternateContent>
-      <mc:AlternateContent xmlns:mc="http://schemas.openxmlformats.org/markup-compatibility/2006">
-        <mc:Choice xmlns:a14="http://schemas.microsoft.com/office/drawing/2010/main" Requires="a14">
+      <mc:AlternateContent xmlns:mc="http://schemas.openxmlformats.org/markup-compatibility/2006" xmlns:a14="http://schemas.microsoft.com/office/drawing/2010/main">
+        <mc:Choice Requires="a14">
           <p:sp>
             <p:nvSpPr>
               <p:cNvPr id="48" name="TextBox 47">
@@ -8398,7 +8341,7 @@
             </p:txBody>
           </p:sp>
         </mc:Choice>
-        <mc:Fallback>
+        <mc:Fallback xmlns="">
           <p:sp>
             <p:nvSpPr>
               <p:cNvPr id="48" name="TextBox 47">
@@ -8546,8 +8489,8 @@
           </a:p>
         </p:txBody>
       </p:sp>
-      <mc:AlternateContent xmlns:mc="http://schemas.openxmlformats.org/markup-compatibility/2006">
-        <mc:Choice xmlns:a14="http://schemas.microsoft.com/office/drawing/2010/main" Requires="a14">
+      <mc:AlternateContent xmlns:mc="http://schemas.openxmlformats.org/markup-compatibility/2006" xmlns:a14="http://schemas.microsoft.com/office/drawing/2010/main">
+        <mc:Choice Requires="a14">
           <p:sp>
             <p:nvSpPr>
               <p:cNvPr id="53" name="TextBox 52">
@@ -8606,7 +8549,7 @@
             </p:txBody>
           </p:sp>
         </mc:Choice>
-        <mc:Fallback>
+        <mc:Fallback xmlns="">
           <p:sp>
             <p:nvSpPr>
               <p:cNvPr id="53" name="TextBox 52">
@@ -8651,8 +8594,8 @@
           </p:sp>
         </mc:Fallback>
       </mc:AlternateContent>
-      <mc:AlternateContent xmlns:mc="http://schemas.openxmlformats.org/markup-compatibility/2006">
-        <mc:Choice xmlns:a14="http://schemas.microsoft.com/office/drawing/2010/main" Requires="a14">
+      <mc:AlternateContent xmlns:mc="http://schemas.openxmlformats.org/markup-compatibility/2006" xmlns:a14="http://schemas.microsoft.com/office/drawing/2010/main">
+        <mc:Choice Requires="a14">
           <p:sp>
             <p:nvSpPr>
               <p:cNvPr id="54" name="TextBox 53">
@@ -8715,7 +8658,7 @@
             </p:txBody>
           </p:sp>
         </mc:Choice>
-        <mc:Fallback>
+        <mc:Fallback xmlns="">
           <p:sp>
             <p:nvSpPr>
               <p:cNvPr id="54" name="TextBox 53">
@@ -9079,8 +9022,8 @@
           </a:p>
         </p:txBody>
       </p:sp>
-      <mc:AlternateContent xmlns:mc="http://schemas.openxmlformats.org/markup-compatibility/2006">
-        <mc:Choice xmlns:a14="http://schemas.microsoft.com/office/drawing/2010/main" Requires="a14">
+      <mc:AlternateContent xmlns:mc="http://schemas.openxmlformats.org/markup-compatibility/2006" xmlns:a14="http://schemas.microsoft.com/office/drawing/2010/main">
+        <mc:Choice Requires="a14">
           <p:sp>
             <p:nvSpPr>
               <p:cNvPr id="17" name="TextBox 16">
@@ -9143,7 +9086,7 @@
             </p:txBody>
           </p:sp>
         </mc:Choice>
-        <mc:Fallback>
+        <mc:Fallback xmlns="">
           <p:sp>
             <p:nvSpPr>
               <p:cNvPr id="17" name="TextBox 16">
@@ -10186,8 +10129,8 @@
           </a:p>
         </p:txBody>
       </p:sp>
-      <mc:AlternateContent xmlns:mc="http://schemas.openxmlformats.org/markup-compatibility/2006">
-        <mc:Choice xmlns:a14="http://schemas.microsoft.com/office/drawing/2010/main" Requires="a14">
+      <mc:AlternateContent xmlns:mc="http://schemas.openxmlformats.org/markup-compatibility/2006" xmlns:a14="http://schemas.microsoft.com/office/drawing/2010/main">
+        <mc:Choice Requires="a14">
           <p:sp>
             <p:nvSpPr>
               <p:cNvPr id="46" name="TextBox 45">
@@ -10258,7 +10201,7 @@
             </p:txBody>
           </p:sp>
         </mc:Choice>
-        <mc:Fallback>
+        <mc:Fallback xmlns="">
           <p:sp>
             <p:nvSpPr>
               <p:cNvPr id="46" name="TextBox 45">
@@ -10303,8 +10246,8 @@
           </p:sp>
         </mc:Fallback>
       </mc:AlternateContent>
-      <mc:AlternateContent xmlns:mc="http://schemas.openxmlformats.org/markup-compatibility/2006">
-        <mc:Choice xmlns:a14="http://schemas.microsoft.com/office/drawing/2010/main" Requires="a14">
+      <mc:AlternateContent xmlns:mc="http://schemas.openxmlformats.org/markup-compatibility/2006" xmlns:a14="http://schemas.microsoft.com/office/drawing/2010/main">
+        <mc:Choice Requires="a14">
           <p:sp>
             <p:nvSpPr>
               <p:cNvPr id="48" name="TextBox 47">
@@ -10375,7 +10318,7 @@
             </p:txBody>
           </p:sp>
         </mc:Choice>
-        <mc:Fallback>
+        <mc:Fallback xmlns="">
           <p:sp>
             <p:nvSpPr>
               <p:cNvPr id="48" name="TextBox 47">
@@ -10523,8 +10466,8 @@
           </a:p>
         </p:txBody>
       </p:sp>
-      <mc:AlternateContent xmlns:mc="http://schemas.openxmlformats.org/markup-compatibility/2006">
-        <mc:Choice xmlns:a14="http://schemas.microsoft.com/office/drawing/2010/main" Requires="a14">
+      <mc:AlternateContent xmlns:mc="http://schemas.openxmlformats.org/markup-compatibility/2006" xmlns:a14="http://schemas.microsoft.com/office/drawing/2010/main">
+        <mc:Choice Requires="a14">
           <p:sp>
             <p:nvSpPr>
               <p:cNvPr id="53" name="TextBox 52">
@@ -10583,7 +10526,7 @@
             </p:txBody>
           </p:sp>
         </mc:Choice>
-        <mc:Fallback>
+        <mc:Fallback xmlns="">
           <p:sp>
             <p:nvSpPr>
               <p:cNvPr id="53" name="TextBox 52">
@@ -10628,8 +10571,8 @@
           </p:sp>
         </mc:Fallback>
       </mc:AlternateContent>
-      <mc:AlternateContent xmlns:mc="http://schemas.openxmlformats.org/markup-compatibility/2006">
-        <mc:Choice xmlns:a14="http://schemas.microsoft.com/office/drawing/2010/main" Requires="a14">
+      <mc:AlternateContent xmlns:mc="http://schemas.openxmlformats.org/markup-compatibility/2006" xmlns:a14="http://schemas.microsoft.com/office/drawing/2010/main">
+        <mc:Choice Requires="a14">
           <p:sp>
             <p:nvSpPr>
               <p:cNvPr id="54" name="TextBox 53">
@@ -10692,7 +10635,7 @@
             </p:txBody>
           </p:sp>
         </mc:Choice>
-        <mc:Fallback>
+        <mc:Fallback xmlns="">
           <p:sp>
             <p:nvSpPr>
               <p:cNvPr id="54" name="TextBox 53">
@@ -10885,8 +10828,8 @@
           </a:p>
         </p:txBody>
       </p:sp>
-      <mc:AlternateContent xmlns:mc="http://schemas.openxmlformats.org/markup-compatibility/2006">
-        <mc:Choice xmlns:a14="http://schemas.microsoft.com/office/drawing/2010/main" Requires="a14">
+      <mc:AlternateContent xmlns:mc="http://schemas.openxmlformats.org/markup-compatibility/2006" xmlns:a14="http://schemas.microsoft.com/office/drawing/2010/main">
+        <mc:Choice Requires="a14">
           <p:sp>
             <p:nvSpPr>
               <p:cNvPr id="17" name="TextBox 16">
@@ -10949,7 +10892,7 @@
             </p:txBody>
           </p:sp>
         </mc:Choice>
-        <mc:Fallback>
+        <mc:Fallback xmlns="">
           <p:sp>
             <p:nvSpPr>
               <p:cNvPr id="17" name="TextBox 16">
@@ -11299,8 +11242,8 @@
           </a:p>
         </p:txBody>
       </p:sp>
-      <mc:AlternateContent xmlns:mc="http://schemas.openxmlformats.org/markup-compatibility/2006">
-        <mc:Choice xmlns:a14="http://schemas.microsoft.com/office/drawing/2010/main" Requires="a14">
+      <mc:AlternateContent xmlns:mc="http://schemas.openxmlformats.org/markup-compatibility/2006" xmlns:a14="http://schemas.microsoft.com/office/drawing/2010/main">
+        <mc:Choice Requires="a14">
           <p:sp>
             <p:nvSpPr>
               <p:cNvPr id="14" name="TextBox 13">
@@ -11421,7 +11364,7 @@
             </p:txBody>
           </p:sp>
         </mc:Choice>
-        <mc:Fallback>
+        <mc:Fallback xmlns="">
           <p:sp>
             <p:nvSpPr>
               <p:cNvPr id="14" name="TextBox 13">
@@ -12125,8 +12068,8 @@
           </a:p>
         </p:txBody>
       </p:sp>
-      <mc:AlternateContent xmlns:mc="http://schemas.openxmlformats.org/markup-compatibility/2006">
-        <mc:Choice xmlns:a14="http://schemas.microsoft.com/office/drawing/2010/main" Requires="a14">
+      <mc:AlternateContent xmlns:mc="http://schemas.openxmlformats.org/markup-compatibility/2006" xmlns:a14="http://schemas.microsoft.com/office/drawing/2010/main">
+        <mc:Choice Requires="a14">
           <p:sp>
             <p:nvSpPr>
               <p:cNvPr id="53" name="TextBox 52">
@@ -12185,7 +12128,7 @@
             </p:txBody>
           </p:sp>
         </mc:Choice>
-        <mc:Fallback>
+        <mc:Fallback xmlns="">
           <p:sp>
             <p:nvSpPr>
               <p:cNvPr id="53" name="TextBox 52">
@@ -12230,8 +12173,8 @@
           </p:sp>
         </mc:Fallback>
       </mc:AlternateContent>
-      <mc:AlternateContent xmlns:mc="http://schemas.openxmlformats.org/markup-compatibility/2006">
-        <mc:Choice xmlns:a14="http://schemas.microsoft.com/office/drawing/2010/main" Requires="a14">
+      <mc:AlternateContent xmlns:mc="http://schemas.openxmlformats.org/markup-compatibility/2006" xmlns:a14="http://schemas.microsoft.com/office/drawing/2010/main">
+        <mc:Choice Requires="a14">
           <p:sp>
             <p:nvSpPr>
               <p:cNvPr id="54" name="TextBox 53">
@@ -12294,7 +12237,7 @@
             </p:txBody>
           </p:sp>
         </mc:Choice>
-        <mc:Fallback>
+        <mc:Fallback xmlns="">
           <p:sp>
             <p:nvSpPr>
               <p:cNvPr id="54" name="TextBox 53">
@@ -12487,8 +12430,8 @@
           </a:p>
         </p:txBody>
       </p:sp>
-      <mc:AlternateContent xmlns:mc="http://schemas.openxmlformats.org/markup-compatibility/2006">
-        <mc:Choice xmlns:a14="http://schemas.microsoft.com/office/drawing/2010/main" Requires="a14">
+      <mc:AlternateContent xmlns:mc="http://schemas.openxmlformats.org/markup-compatibility/2006" xmlns:a14="http://schemas.microsoft.com/office/drawing/2010/main">
+        <mc:Choice Requires="a14">
           <p:sp>
             <p:nvSpPr>
               <p:cNvPr id="17" name="TextBox 16">
@@ -12560,7 +12503,7 @@
             </p:txBody>
           </p:sp>
         </mc:Choice>
-        <mc:Fallback>
+        <mc:Fallback xmlns="">
           <p:sp>
             <p:nvSpPr>
               <p:cNvPr id="17" name="TextBox 16">
@@ -12910,8 +12853,8 @@
           </a:p>
         </p:txBody>
       </p:sp>
-      <mc:AlternateContent xmlns:mc="http://schemas.openxmlformats.org/markup-compatibility/2006">
-        <mc:Choice xmlns:a14="http://schemas.microsoft.com/office/drawing/2010/main" Requires="a14">
+      <mc:AlternateContent xmlns:mc="http://schemas.openxmlformats.org/markup-compatibility/2006" xmlns:a14="http://schemas.microsoft.com/office/drawing/2010/main">
+        <mc:Choice Requires="a14">
           <p:sp>
             <p:nvSpPr>
               <p:cNvPr id="13" name="TextBox 12">
@@ -13100,7 +13043,7 @@
             </p:txBody>
           </p:sp>
         </mc:Choice>
-        <mc:Fallback>
+        <mc:Fallback xmlns="">
           <p:sp>
             <p:nvSpPr>
               <p:cNvPr id="13" name="TextBox 12">
@@ -13145,8 +13088,8 @@
           </p:sp>
         </mc:Fallback>
       </mc:AlternateContent>
-      <mc:AlternateContent xmlns:mc="http://schemas.openxmlformats.org/markup-compatibility/2006">
-        <mc:Choice xmlns:a14="http://schemas.microsoft.com/office/drawing/2010/main" Requires="a14">
+      <mc:AlternateContent xmlns:mc="http://schemas.openxmlformats.org/markup-compatibility/2006" xmlns:a14="http://schemas.microsoft.com/office/drawing/2010/main">
+        <mc:Choice Requires="a14">
           <p:sp>
             <p:nvSpPr>
               <p:cNvPr id="19" name="TextBox 18">
@@ -13287,7 +13230,7 @@
             </p:txBody>
           </p:sp>
         </mc:Choice>
-        <mc:Fallback>
+        <mc:Fallback xmlns="">
           <p:sp>
             <p:nvSpPr>
               <p:cNvPr id="19" name="TextBox 18">
@@ -13991,8 +13934,8 @@
           </a:p>
         </p:txBody>
       </p:sp>
-      <mc:AlternateContent xmlns:mc="http://schemas.openxmlformats.org/markup-compatibility/2006">
-        <mc:Choice xmlns:a14="http://schemas.microsoft.com/office/drawing/2010/main" Requires="a14">
+      <mc:AlternateContent xmlns:mc="http://schemas.openxmlformats.org/markup-compatibility/2006" xmlns:a14="http://schemas.microsoft.com/office/drawing/2010/main">
+        <mc:Choice Requires="a14">
           <p:sp>
             <p:nvSpPr>
               <p:cNvPr id="53" name="TextBox 52">
@@ -14051,7 +13994,7 @@
             </p:txBody>
           </p:sp>
         </mc:Choice>
-        <mc:Fallback>
+        <mc:Fallback xmlns="">
           <p:sp>
             <p:nvSpPr>
               <p:cNvPr id="53" name="TextBox 52">
@@ -14096,8 +14039,8 @@
           </p:sp>
         </mc:Fallback>
       </mc:AlternateContent>
-      <mc:AlternateContent xmlns:mc="http://schemas.openxmlformats.org/markup-compatibility/2006">
-        <mc:Choice xmlns:a14="http://schemas.microsoft.com/office/drawing/2010/main" Requires="a14">
+      <mc:AlternateContent xmlns:mc="http://schemas.openxmlformats.org/markup-compatibility/2006" xmlns:a14="http://schemas.microsoft.com/office/drawing/2010/main">
+        <mc:Choice Requires="a14">
           <p:sp>
             <p:nvSpPr>
               <p:cNvPr id="54" name="TextBox 53">
@@ -14160,7 +14103,7 @@
             </p:txBody>
           </p:sp>
         </mc:Choice>
-        <mc:Fallback>
+        <mc:Fallback xmlns="">
           <p:sp>
             <p:nvSpPr>
               <p:cNvPr id="54" name="TextBox 53">
@@ -14329,8 +14272,8 @@
           </a:p>
         </p:txBody>
       </p:sp>
-      <mc:AlternateContent xmlns:mc="http://schemas.openxmlformats.org/markup-compatibility/2006">
-        <mc:Choice xmlns:a14="http://schemas.microsoft.com/office/drawing/2010/main" Requires="a14">
+      <mc:AlternateContent xmlns:mc="http://schemas.openxmlformats.org/markup-compatibility/2006" xmlns:a14="http://schemas.microsoft.com/office/drawing/2010/main">
+        <mc:Choice Requires="a14">
           <p:sp>
             <p:nvSpPr>
               <p:cNvPr id="17" name="TextBox 16">
@@ -14402,7 +14345,7 @@
             </p:txBody>
           </p:sp>
         </mc:Choice>
-        <mc:Fallback>
+        <mc:Fallback xmlns="">
           <p:sp>
             <p:nvSpPr>
               <p:cNvPr id="17" name="TextBox 16">
@@ -14752,8 +14695,8 @@
           </a:p>
         </p:txBody>
       </p:sp>
-      <mc:AlternateContent xmlns:mc="http://schemas.openxmlformats.org/markup-compatibility/2006">
-        <mc:Choice xmlns:a14="http://schemas.microsoft.com/office/drawing/2010/main" Requires="a14">
+      <mc:AlternateContent xmlns:mc="http://schemas.openxmlformats.org/markup-compatibility/2006" xmlns:a14="http://schemas.microsoft.com/office/drawing/2010/main">
+        <mc:Choice Requires="a14">
           <p:sp>
             <p:nvSpPr>
               <p:cNvPr id="13" name="TextBox 12">
@@ -14942,7 +14885,7 @@
             </p:txBody>
           </p:sp>
         </mc:Choice>
-        <mc:Fallback>
+        <mc:Fallback xmlns="">
           <p:sp>
             <p:nvSpPr>
               <p:cNvPr id="13" name="TextBox 12">
@@ -14987,8 +14930,8 @@
           </p:sp>
         </mc:Fallback>
       </mc:AlternateContent>
-      <mc:AlternateContent xmlns:mc="http://schemas.openxmlformats.org/markup-compatibility/2006">
-        <mc:Choice xmlns:a14="http://schemas.microsoft.com/office/drawing/2010/main" Requires="a14">
+      <mc:AlternateContent xmlns:mc="http://schemas.openxmlformats.org/markup-compatibility/2006" xmlns:a14="http://schemas.microsoft.com/office/drawing/2010/main">
+        <mc:Choice Requires="a14">
           <p:sp>
             <p:nvSpPr>
               <p:cNvPr id="19" name="TextBox 18">
@@ -15129,7 +15072,7 @@
             </p:txBody>
           </p:sp>
         </mc:Choice>
-        <mc:Fallback>
+        <mc:Fallback xmlns="">
           <p:sp>
             <p:nvSpPr>
               <p:cNvPr id="19" name="TextBox 18">
@@ -19685,8 +19628,8 @@
           </a:p>
         </p:txBody>
       </p:sp>
-      <mc:AlternateContent xmlns:mc="http://schemas.openxmlformats.org/markup-compatibility/2006">
-        <mc:Choice xmlns:a14="http://schemas.microsoft.com/office/drawing/2010/main" Requires="a14">
+      <mc:AlternateContent xmlns:mc="http://schemas.openxmlformats.org/markup-compatibility/2006" xmlns:a14="http://schemas.microsoft.com/office/drawing/2010/main">
+        <mc:Choice Requires="a14">
           <p:sp>
             <p:nvSpPr>
               <p:cNvPr id="53" name="TextBox 52">
@@ -19745,7 +19688,7 @@
             </p:txBody>
           </p:sp>
         </mc:Choice>
-        <mc:Fallback>
+        <mc:Fallback xmlns="">
           <p:sp>
             <p:nvSpPr>
               <p:cNvPr id="53" name="TextBox 52">
@@ -19790,8 +19733,8 @@
           </p:sp>
         </mc:Fallback>
       </mc:AlternateContent>
-      <mc:AlternateContent xmlns:mc="http://schemas.openxmlformats.org/markup-compatibility/2006">
-        <mc:Choice xmlns:a14="http://schemas.microsoft.com/office/drawing/2010/main" Requires="a14">
+      <mc:AlternateContent xmlns:mc="http://schemas.openxmlformats.org/markup-compatibility/2006" xmlns:a14="http://schemas.microsoft.com/office/drawing/2010/main">
+        <mc:Choice Requires="a14">
           <p:sp>
             <p:nvSpPr>
               <p:cNvPr id="54" name="TextBox 53">
@@ -19854,7 +19797,7 @@
             </p:txBody>
           </p:sp>
         </mc:Choice>
-        <mc:Fallback>
+        <mc:Fallback xmlns="">
           <p:sp>
             <p:nvSpPr>
               <p:cNvPr id="54" name="TextBox 53">
@@ -19945,8 +19888,8 @@
           </a:p>
         </p:txBody>
       </p:sp>
-      <mc:AlternateContent xmlns:mc="http://schemas.openxmlformats.org/markup-compatibility/2006">
-        <mc:Choice xmlns:a14="http://schemas.microsoft.com/office/drawing/2010/main" Requires="a14">
+      <mc:AlternateContent xmlns:mc="http://schemas.openxmlformats.org/markup-compatibility/2006" xmlns:a14="http://schemas.microsoft.com/office/drawing/2010/main">
+        <mc:Choice Requires="a14">
           <p:sp>
             <p:nvSpPr>
               <p:cNvPr id="17" name="TextBox 16">
@@ -20006,7 +19949,7 @@
             </p:txBody>
           </p:sp>
         </mc:Choice>
-        <mc:Fallback>
+        <mc:Fallback xmlns="">
           <p:sp>
             <p:nvSpPr>
               <p:cNvPr id="17" name="TextBox 16">
@@ -20356,8 +20299,8 @@
           </a:p>
         </p:txBody>
       </p:sp>
-      <mc:AlternateContent xmlns:mc="http://schemas.openxmlformats.org/markup-compatibility/2006">
-        <mc:Choice xmlns:a14="http://schemas.microsoft.com/office/drawing/2010/main" Requires="a14">
+      <mc:AlternateContent xmlns:mc="http://schemas.openxmlformats.org/markup-compatibility/2006" xmlns:a14="http://schemas.microsoft.com/office/drawing/2010/main">
+        <mc:Choice Requires="a14">
           <p:sp>
             <p:nvSpPr>
               <p:cNvPr id="19" name="TextBox 18">
@@ -20498,7 +20441,7 @@
             </p:txBody>
           </p:sp>
         </mc:Choice>
-        <mc:Fallback>
+        <mc:Fallback xmlns="">
           <p:sp>
             <p:nvSpPr>
               <p:cNvPr id="19" name="TextBox 18">
@@ -20543,8 +20486,8 @@
           </p:sp>
         </mc:Fallback>
       </mc:AlternateContent>
-      <mc:AlternateContent xmlns:mc="http://schemas.openxmlformats.org/markup-compatibility/2006">
-        <mc:Choice xmlns:a14="http://schemas.microsoft.com/office/drawing/2010/main" Requires="a14">
+      <mc:AlternateContent xmlns:mc="http://schemas.openxmlformats.org/markup-compatibility/2006" xmlns:a14="http://schemas.microsoft.com/office/drawing/2010/main">
+        <mc:Choice Requires="a14">
           <p:sp>
             <p:nvSpPr>
               <p:cNvPr id="16" name="TextBox 15">
@@ -20606,13 +20549,7 @@
                         <a:rPr lang="en-US" sz="2000" b="0" i="1" smtClean="0">
                           <a:latin typeface="Cambria Math" panose="02040503050406030204" pitchFamily="18" charset="0"/>
                         </a:rPr>
-                        <m:t>=</m:t>
-                      </m:r>
-                      <m:r>
-                        <a:rPr lang="en-US" sz="2000" b="0" i="1" smtClean="0">
-                          <a:latin typeface="Cambria Math" panose="02040503050406030204" pitchFamily="18" charset="0"/>
-                        </a:rPr>
-                        <m:t>300 </m:t>
+                        <m:t>=300 </m:t>
                       </m:r>
                       <m:r>
                         <a:rPr lang="en-US" sz="2000" b="0" i="1" smtClean="0">
@@ -20628,7 +20565,7 @@
             </p:txBody>
           </p:sp>
         </mc:Choice>
-        <mc:Fallback>
+        <mc:Fallback xmlns="">
           <p:sp>
             <p:nvSpPr>
               <p:cNvPr id="16" name="TextBox 15">
@@ -20673,8 +20610,8 @@
           </p:sp>
         </mc:Fallback>
       </mc:AlternateContent>
-      <mc:AlternateContent xmlns:mc="http://schemas.openxmlformats.org/markup-compatibility/2006">
-        <mc:Choice xmlns:a14="http://schemas.microsoft.com/office/drawing/2010/main" Requires="a14">
+      <mc:AlternateContent xmlns:mc="http://schemas.openxmlformats.org/markup-compatibility/2006" xmlns:a14="http://schemas.microsoft.com/office/drawing/2010/main">
+        <mc:Choice Requires="a14">
           <p:sp>
             <p:nvSpPr>
               <p:cNvPr id="23" name="TextBox 22">
@@ -20736,13 +20673,7 @@
                         <a:rPr lang="en-US" sz="2000" b="0" i="1" smtClean="0">
                           <a:latin typeface="Cambria Math" panose="02040503050406030204" pitchFamily="18" charset="0"/>
                         </a:rPr>
-                        <m:t>=</m:t>
-                      </m:r>
-                      <m:r>
-                        <a:rPr lang="en-US" sz="2000" b="0" i="1" smtClean="0">
-                          <a:latin typeface="Cambria Math" panose="02040503050406030204" pitchFamily="18" charset="0"/>
-                        </a:rPr>
-                        <m:t>50 </m:t>
+                        <m:t>=50 </m:t>
                       </m:r>
                       <m:r>
                         <a:rPr lang="en-US" sz="2000" b="0" i="1" smtClean="0">
@@ -20758,7 +20689,7 @@
             </p:txBody>
           </p:sp>
         </mc:Choice>
-        <mc:Fallback>
+        <mc:Fallback xmlns="">
           <p:sp>
             <p:nvSpPr>
               <p:cNvPr id="23" name="TextBox 22">
@@ -20803,8 +20734,8 @@
           </p:sp>
         </mc:Fallback>
       </mc:AlternateContent>
-      <mc:AlternateContent xmlns:mc="http://schemas.openxmlformats.org/markup-compatibility/2006">
-        <mc:Choice xmlns:a14="http://schemas.microsoft.com/office/drawing/2010/main" Requires="a14">
+      <mc:AlternateContent xmlns:mc="http://schemas.openxmlformats.org/markup-compatibility/2006" xmlns:a14="http://schemas.microsoft.com/office/drawing/2010/main">
+        <mc:Choice Requires="a14">
           <p:sp>
             <p:nvSpPr>
               <p:cNvPr id="24" name="TextBox 23">
@@ -20866,13 +20797,7 @@
                         <a:rPr lang="en-US" sz="2000" b="0" i="1" smtClean="0">
                           <a:latin typeface="Cambria Math" panose="02040503050406030204" pitchFamily="18" charset="0"/>
                         </a:rPr>
-                        <m:t>=</m:t>
-                      </m:r>
-                      <m:r>
-                        <a:rPr lang="en-US" sz="2000" b="0" i="1" smtClean="0">
-                          <a:latin typeface="Cambria Math" panose="02040503050406030204" pitchFamily="18" charset="0"/>
-                        </a:rPr>
-                        <m:t>0 </m:t>
+                        <m:t>=0 </m:t>
                       </m:r>
                       <m:r>
                         <a:rPr lang="en-US" sz="2000" b="0" i="1" smtClean="0">
@@ -20888,7 +20813,7 @@
             </p:txBody>
           </p:sp>
         </mc:Choice>
-        <mc:Fallback>
+        <mc:Fallback xmlns="">
           <p:sp>
             <p:nvSpPr>
               <p:cNvPr id="24" name="TextBox 23">
@@ -28976,8 +28901,8 @@
           </a:p>
         </p:txBody>
       </p:sp>
-      <mc:AlternateContent xmlns:mc="http://schemas.openxmlformats.org/markup-compatibility/2006">
-        <mc:Choice xmlns:a14="http://schemas.microsoft.com/office/drawing/2010/main" Requires="a14">
+      <mc:AlternateContent xmlns:mc="http://schemas.openxmlformats.org/markup-compatibility/2006" xmlns:a14="http://schemas.microsoft.com/office/drawing/2010/main">
+        <mc:Choice Requires="a14">
           <p:sp>
             <p:nvSpPr>
               <p:cNvPr id="25" name="TextBox 24">
@@ -29006,6 +28931,7 @@
               </a:bodyPr>
               <a:lstStyle/>
               <a:p>
+                <a:pPr/>
                 <a14:m>
                   <m:oMathPara xmlns:m="http://schemas.openxmlformats.org/officeDocument/2006/math">
                     <m:oMath>
@@ -29047,7 +28973,7 @@
             </p:txBody>
           </p:sp>
         </mc:Choice>
-        <mc:Fallback>
+        <mc:Fallback xmlns="">
           <p:sp>
             <p:nvSpPr>
               <p:cNvPr id="25" name="TextBox 24">
@@ -29092,8 +29018,8 @@
           </p:sp>
         </mc:Fallback>
       </mc:AlternateContent>
-      <mc:AlternateContent xmlns:mc="http://schemas.openxmlformats.org/markup-compatibility/2006">
-        <mc:Choice xmlns:a14="http://schemas.microsoft.com/office/drawing/2010/main" Requires="a14">
+      <mc:AlternateContent xmlns:mc="http://schemas.openxmlformats.org/markup-compatibility/2006" xmlns:a14="http://schemas.microsoft.com/office/drawing/2010/main">
+        <mc:Choice Requires="a14">
           <p:sp>
             <p:nvSpPr>
               <p:cNvPr id="26" name="TextBox 25">
@@ -29122,6 +29048,7 @@
               </a:bodyPr>
               <a:lstStyle/>
               <a:p>
+                <a:pPr/>
                 <a14:m>
                   <m:oMathPara xmlns:m="http://schemas.openxmlformats.org/officeDocument/2006/math">
                     <m:oMath>
@@ -29170,7 +29097,7 @@
             </p:txBody>
           </p:sp>
         </mc:Choice>
-        <mc:Fallback>
+        <mc:Fallback xmlns="">
           <p:sp>
             <p:nvSpPr>
               <p:cNvPr id="26" name="TextBox 25">
@@ -29215,8 +29142,8 @@
           </p:sp>
         </mc:Fallback>
       </mc:AlternateContent>
-      <mc:AlternateContent xmlns:mc="http://schemas.openxmlformats.org/markup-compatibility/2006">
-        <mc:Choice xmlns:a14="http://schemas.microsoft.com/office/drawing/2010/main" Requires="a14">
+      <mc:AlternateContent xmlns:mc="http://schemas.openxmlformats.org/markup-compatibility/2006" xmlns:a14="http://schemas.microsoft.com/office/drawing/2010/main">
+        <mc:Choice Requires="a14">
           <p:sp>
             <p:nvSpPr>
               <p:cNvPr id="27" name="TextBox 26">
@@ -29245,6 +29172,7 @@
               </a:bodyPr>
               <a:lstStyle/>
               <a:p>
+                <a:pPr/>
                 <a14:m>
                   <m:oMathPara xmlns:m="http://schemas.openxmlformats.org/officeDocument/2006/math">
                     <m:oMath>
@@ -29293,7 +29221,7 @@
             </p:txBody>
           </p:sp>
         </mc:Choice>
-        <mc:Fallback>
+        <mc:Fallback xmlns="">
           <p:sp>
             <p:nvSpPr>
               <p:cNvPr id="27" name="TextBox 26">
@@ -30803,8 +30731,8 @@
           </a:p>
         </p:txBody>
       </p:sp>
-      <mc:AlternateContent xmlns:mc="http://schemas.openxmlformats.org/markup-compatibility/2006">
-        <mc:Choice xmlns:a14="http://schemas.microsoft.com/office/drawing/2010/main" Requires="a14">
+      <mc:AlternateContent xmlns:mc="http://schemas.openxmlformats.org/markup-compatibility/2006" xmlns:a14="http://schemas.microsoft.com/office/drawing/2010/main">
+        <mc:Choice Requires="a14">
           <p:sp>
             <p:nvSpPr>
               <p:cNvPr id="25" name="TextBox 24">
@@ -30875,7 +30803,7 @@
             </p:txBody>
           </p:sp>
         </mc:Choice>
-        <mc:Fallback>
+        <mc:Fallback xmlns="">
           <p:sp>
             <p:nvSpPr>
               <p:cNvPr id="25" name="TextBox 24">
@@ -30920,8 +30848,8 @@
           </p:sp>
         </mc:Fallback>
       </mc:AlternateContent>
-      <mc:AlternateContent xmlns:mc="http://schemas.openxmlformats.org/markup-compatibility/2006">
-        <mc:Choice xmlns:a14="http://schemas.microsoft.com/office/drawing/2010/main" Requires="a14">
+      <mc:AlternateContent xmlns:mc="http://schemas.openxmlformats.org/markup-compatibility/2006" xmlns:a14="http://schemas.microsoft.com/office/drawing/2010/main">
+        <mc:Choice Requires="a14">
           <p:sp>
             <p:nvSpPr>
               <p:cNvPr id="26" name="TextBox 25">
@@ -31018,7 +30946,7 @@
             </p:txBody>
           </p:sp>
         </mc:Choice>
-        <mc:Fallback>
+        <mc:Fallback xmlns="">
           <p:sp>
             <p:nvSpPr>
               <p:cNvPr id="26" name="TextBox 25">
@@ -31063,8 +30991,8 @@
           </p:sp>
         </mc:Fallback>
       </mc:AlternateContent>
-      <mc:AlternateContent xmlns:mc="http://schemas.openxmlformats.org/markup-compatibility/2006">
-        <mc:Choice xmlns:a14="http://schemas.microsoft.com/office/drawing/2010/main" Requires="a14">
+      <mc:AlternateContent xmlns:mc="http://schemas.openxmlformats.org/markup-compatibility/2006" xmlns:a14="http://schemas.microsoft.com/office/drawing/2010/main">
+        <mc:Choice Requires="a14">
           <p:sp>
             <p:nvSpPr>
               <p:cNvPr id="19" name="TextBox 18">
@@ -31135,7 +31063,7 @@
             </p:txBody>
           </p:sp>
         </mc:Choice>
-        <mc:Fallback>
+        <mc:Fallback xmlns="">
           <p:sp>
             <p:nvSpPr>
               <p:cNvPr id="19" name="TextBox 18">
@@ -31180,8 +31108,8 @@
           </p:sp>
         </mc:Fallback>
       </mc:AlternateContent>
-      <mc:AlternateContent xmlns:mc="http://schemas.openxmlformats.org/markup-compatibility/2006">
-        <mc:Choice xmlns:a14="http://schemas.microsoft.com/office/drawing/2010/main" Requires="a14">
+      <mc:AlternateContent xmlns:mc="http://schemas.openxmlformats.org/markup-compatibility/2006" xmlns:a14="http://schemas.microsoft.com/office/drawing/2010/main">
+        <mc:Choice Requires="a14">
           <p:sp>
             <p:nvSpPr>
               <p:cNvPr id="32" name="TextBox 31">
@@ -31265,7 +31193,7 @@
             </p:txBody>
           </p:sp>
         </mc:Choice>
-        <mc:Fallback>
+        <mc:Fallback xmlns="">
           <p:sp>
             <p:nvSpPr>
               <p:cNvPr id="32" name="TextBox 31">
@@ -31310,8 +31238,8 @@
           </p:sp>
         </mc:Fallback>
       </mc:AlternateContent>
-      <mc:AlternateContent xmlns:mc="http://schemas.openxmlformats.org/markup-compatibility/2006">
-        <mc:Choice xmlns:a14="http://schemas.microsoft.com/office/drawing/2010/main" Requires="a14">
+      <mc:AlternateContent xmlns:mc="http://schemas.openxmlformats.org/markup-compatibility/2006" xmlns:a14="http://schemas.microsoft.com/office/drawing/2010/main">
+        <mc:Choice Requires="a14">
           <p:sp>
             <p:nvSpPr>
               <p:cNvPr id="33" name="TextBox 32">
@@ -31389,7 +31317,7 @@
             </p:txBody>
           </p:sp>
         </mc:Choice>
-        <mc:Fallback>
+        <mc:Fallback xmlns="">
           <p:sp>
             <p:nvSpPr>
               <p:cNvPr id="33" name="TextBox 32">
@@ -31434,8 +31362,8 @@
           </p:sp>
         </mc:Fallback>
       </mc:AlternateContent>
-      <mc:AlternateContent xmlns:mc="http://schemas.openxmlformats.org/markup-compatibility/2006">
-        <mc:Choice xmlns:a14="http://schemas.microsoft.com/office/drawing/2010/main" Requires="a14">
+      <mc:AlternateContent xmlns:mc="http://schemas.openxmlformats.org/markup-compatibility/2006" xmlns:a14="http://schemas.microsoft.com/office/drawing/2010/main">
+        <mc:Choice Requires="a14">
           <p:sp>
             <p:nvSpPr>
               <p:cNvPr id="34" name="TextBox 33">
@@ -31513,7 +31441,7 @@
             </p:txBody>
           </p:sp>
         </mc:Choice>
-        <mc:Fallback>
+        <mc:Fallback xmlns="">
           <p:sp>
             <p:nvSpPr>
               <p:cNvPr id="34" name="TextBox 33">
@@ -31609,8 +31537,8 @@
           </a:p>
         </p:txBody>
       </p:sp>
-      <mc:AlternateContent xmlns:mc="http://schemas.openxmlformats.org/markup-compatibility/2006">
-        <mc:Choice xmlns:a14="http://schemas.microsoft.com/office/drawing/2010/main" Requires="a14">
+      <mc:AlternateContent xmlns:mc="http://schemas.openxmlformats.org/markup-compatibility/2006" xmlns:a14="http://schemas.microsoft.com/office/drawing/2010/main">
+        <mc:Choice Requires="a14">
           <p:sp>
             <p:nvSpPr>
               <p:cNvPr id="38" name="TextBox 37">
@@ -31688,7 +31616,7 @@
             </p:txBody>
           </p:sp>
         </mc:Choice>
-        <mc:Fallback>
+        <mc:Fallback xmlns="">
           <p:sp>
             <p:nvSpPr>
               <p:cNvPr id="38" name="TextBox 37">
@@ -32274,8 +32202,8 @@
           </a:p>
         </p:txBody>
       </p:sp>
-      <mc:AlternateContent xmlns:mc="http://schemas.openxmlformats.org/markup-compatibility/2006">
-        <mc:Choice xmlns:a14="http://schemas.microsoft.com/office/drawing/2010/main" Requires="a14">
+      <mc:AlternateContent xmlns:mc="http://schemas.openxmlformats.org/markup-compatibility/2006" xmlns:a14="http://schemas.microsoft.com/office/drawing/2010/main">
+        <mc:Choice Requires="a14">
           <p:sp>
             <p:nvSpPr>
               <p:cNvPr id="46" name="TextBox 45">
@@ -32346,7 +32274,7 @@
             </p:txBody>
           </p:sp>
         </mc:Choice>
-        <mc:Fallback>
+        <mc:Fallback xmlns="">
           <p:sp>
             <p:nvSpPr>
               <p:cNvPr id="46" name="TextBox 45">
@@ -32391,8 +32319,8 @@
           </p:sp>
         </mc:Fallback>
       </mc:AlternateContent>
-      <mc:AlternateContent xmlns:mc="http://schemas.openxmlformats.org/markup-compatibility/2006">
-        <mc:Choice xmlns:a14="http://schemas.microsoft.com/office/drawing/2010/main" Requires="a14">
+      <mc:AlternateContent xmlns:mc="http://schemas.openxmlformats.org/markup-compatibility/2006" xmlns:a14="http://schemas.microsoft.com/office/drawing/2010/main">
+        <mc:Choice Requires="a14">
           <p:sp>
             <p:nvSpPr>
               <p:cNvPr id="48" name="TextBox 47">
@@ -32463,7 +32391,7 @@
             </p:txBody>
           </p:sp>
         </mc:Choice>
-        <mc:Fallback>
+        <mc:Fallback xmlns="">
           <p:sp>
             <p:nvSpPr>
               <p:cNvPr id="48" name="TextBox 47">
@@ -32611,8 +32539,8 @@
           </a:p>
         </p:txBody>
       </p:sp>
-      <mc:AlternateContent xmlns:mc="http://schemas.openxmlformats.org/markup-compatibility/2006">
-        <mc:Choice xmlns:a14="http://schemas.microsoft.com/office/drawing/2010/main" Requires="a14">
+      <mc:AlternateContent xmlns:mc="http://schemas.openxmlformats.org/markup-compatibility/2006" xmlns:a14="http://schemas.microsoft.com/office/drawing/2010/main">
+        <mc:Choice Requires="a14">
           <p:sp>
             <p:nvSpPr>
               <p:cNvPr id="53" name="TextBox 52">
@@ -32671,7 +32599,7 @@
             </p:txBody>
           </p:sp>
         </mc:Choice>
-        <mc:Fallback>
+        <mc:Fallback xmlns="">
           <p:sp>
             <p:nvSpPr>
               <p:cNvPr id="53" name="TextBox 52">
@@ -32716,8 +32644,8 @@
           </p:sp>
         </mc:Fallback>
       </mc:AlternateContent>
-      <mc:AlternateContent xmlns:mc="http://schemas.openxmlformats.org/markup-compatibility/2006">
-        <mc:Choice xmlns:a14="http://schemas.microsoft.com/office/drawing/2010/main" Requires="a14">
+      <mc:AlternateContent xmlns:mc="http://schemas.openxmlformats.org/markup-compatibility/2006" xmlns:a14="http://schemas.microsoft.com/office/drawing/2010/main">
+        <mc:Choice Requires="a14">
           <p:sp>
             <p:nvSpPr>
               <p:cNvPr id="54" name="TextBox 53">
@@ -32780,7 +32708,7 @@
             </p:txBody>
           </p:sp>
         </mc:Choice>
-        <mc:Fallback>
+        <mc:Fallback xmlns="">
           <p:sp>
             <p:nvSpPr>
               <p:cNvPr id="54" name="TextBox 53">
